--- a/curso/pptx/S50.pptx
+++ b/curso/pptx/S50.pptx
@@ -5190,7 +5190,7 @@
                 </a:solidFill>
                 <a:latin typeface="Nunito Sans"/>
               </a:rPr>
-              <a:t>Espera:</a:t>
+              <a:t>等一等：</a:t>
             </a:r>
             <a:r>
               <a:rPr sz="2800" b="0">
@@ -5199,7 +5199,7 @@
                 </a:solidFill>
                 <a:latin typeface="Nunito Sans"/>
               </a:rPr>
-              <a:t> si es bueno hoy, seguirá siéndolo mañana.</a:t>
+              <a:t>如果今天它是好的，明天也还会是好的。</a:t>
             </a:r>
           </a:p>
           <a:p>
@@ -5224,7 +5224,7 @@
                 </a:solidFill>
                 <a:latin typeface="Nunito Sans"/>
               </a:rPr>
-              <a:t>Quita el truco:</a:t>
+              <a:t>去掉把戏：</a:t>
             </a:r>
             <a:r>
               <a:rPr sz="2800" b="0">
@@ -5233,7 +5233,7 @@
                 </a:solidFill>
                 <a:latin typeface="Nunito Sans"/>
               </a:rPr>
-              <a:t> ¿qué queda si borro la prisa y los famosos?</a:t>
+              <a:t>如果我把催促和名人都去掉，还剩下什么？</a:t>
             </a:r>
           </a:p>
           <a:p>
@@ -5258,7 +5258,7 @@
                 </a:solidFill>
                 <a:latin typeface="Nunito Sans"/>
               </a:rPr>
-              <a:t>Compara:</a:t>
+              <a:t>比较：</a:t>
             </a:r>
             <a:r>
               <a:rPr sz="2800" b="0">
@@ -5267,7 +5267,7 @@
                 </a:solidFill>
                 <a:latin typeface="Nunito Sans"/>
               </a:rPr>
-              <a:t> mira el precio y las opiniones en otro sitio.</a:t>
+              <a:t>到别的地方看看价格和评价。</a:t>
             </a:r>
           </a:p>
         </p:txBody>
@@ -7061,7 +7061,7 @@
                 </a:solidFill>
                 <a:latin typeface="Nunito Sans"/>
               </a:rPr>
-              <a:t>Un anuncio también puede dar información útil</a:t>
+              <a:t>一则广告也可以提供有用的信息</a:t>
             </a:r>
           </a:p>
           <a:p>
@@ -7086,7 +7086,7 @@
                 </a:solidFill>
                 <a:latin typeface="Nunito Sans"/>
               </a:rPr>
-              <a:t>Muchas no hablan del producto: hablan de nosotros</a:t>
+              <a:t>很多广告说的不是产品，而是在说我们自己</a:t>
             </a:r>
           </a:p>
           <a:p>
@@ -7111,7 +7111,7 @@
                 </a:solidFill>
                 <a:latin typeface="Nunito Sans"/>
               </a:rPr>
-              <a:t>Saber que existen ayuda, pero no nos protege del todo</a:t>
+              <a:t>知道这些技巧的存在有帮助，但并不能完全保护我们</a:t>
             </a:r>
           </a:p>
         </p:txBody>
@@ -7734,7 +7734,7 @@
                 </a:solidFill>
                 <a:latin typeface="Nunito Sans"/>
               </a:rPr>
-              <a:t>Urgencia y escasez:</a:t>
+              <a:t>紧迫感和稀缺感：</a:t>
             </a:r>
             <a:r>
               <a:rPr sz="2800" b="0">
@@ -7743,7 +7743,7 @@
                 </a:solidFill>
                 <a:latin typeface="Nunito Sans"/>
               </a:rPr>
-              <a:t> tenemos miedo a perder una oportunidad.</a:t>
+              <a:t>我们害怕错过机会。</a:t>
             </a:r>
           </a:p>
           <a:p>
@@ -7768,7 +7768,7 @@
                 </a:solidFill>
                 <a:latin typeface="Nunito Sans"/>
               </a:rPr>
-              <a:t>Simpatía:</a:t>
+              <a:t>好感：</a:t>
             </a:r>
             <a:r>
               <a:rPr sz="2800" b="0">
@@ -7777,7 +7777,7 @@
                 </a:solidFill>
                 <a:latin typeface="Nunito Sans"/>
               </a:rPr>
-              <a:t> nos fiamos más de quien nos cae bien.</a:t>
+              <a:t>我们更相信自己喜欢的人。</a:t>
             </a:r>
           </a:p>
           <a:p>
@@ -7802,7 +7802,7 @@
                 </a:solidFill>
                 <a:latin typeface="Nunito Sans"/>
               </a:rPr>
-              <a:t>Pertenencia:</a:t>
+              <a:t>归属感：</a:t>
             </a:r>
             <a:r>
               <a:rPr sz="2800" b="0">
@@ -7811,7 +7811,7 @@
                 </a:solidFill>
                 <a:latin typeface="Nunito Sans"/>
               </a:rPr>
-              <a:t> queremos encajar en el grupo （第28课）.</a:t>
+              <a:t>我们想融入群体（第28课）。</a:t>
             </a:r>
           </a:p>
           <a:p>
@@ -7836,7 +7836,7 @@
                 </a:solidFill>
                 <a:latin typeface="Nunito Sans"/>
               </a:rPr>
-              <a:t>Las cuatro pueden hacer que decidas sin pensar en el </a:t>
+              <a:t>这四种技巧都可能让你在没有思考</a:t>
             </a:r>
             <a:r>
               <a:rPr sz="2800" b="1">
@@ -7845,7 +7845,7 @@
                 </a:solidFill>
                 <a:latin typeface="Nunito Sans"/>
               </a:rPr>
-              <a:t>producto</a:t>
+              <a:t>产品</a:t>
             </a:r>
             <a:r>
               <a:rPr sz="2800" b="0">
@@ -7854,7 +7854,7 @@
                 </a:solidFill>
                 <a:latin typeface="Nunito Sans"/>
               </a:rPr>
-              <a:t>.</a:t>
+              <a:t>的情况下就做出决定。</a:t>
             </a:r>
           </a:p>
         </p:txBody>
